--- a/presentation/api-patterns-grpc-quarkus/api-patterns-grpc-quarkus-r1.0.pptx
+++ b/presentation/api-patterns-grpc-quarkus/api-patterns-grpc-quarkus-r1.0.pptx
@@ -567,7 +567,7 @@
           <a:p>
             <a:r>
               <a:rPr lang="en-US" dirty="0"/>
-              <a:t>Welcome to the Quarkus implementation deck. This is deck two of three in the API Patterns &amp; Practices: gRPC series. The concepts deck established the patterns and the reasoning, stack-agnostic; this deck shows how each of those patterns is actually built in Quarkus — the quarkus-grpc extension, generated Mutiny stubs, Uni for unary calls and Multi for every streaming shape — against the same shared Protobuf contract and the same shipping and cargo domain. Everything you'll see is real code pulled from the site's runnable examples under examples star slash quarkus. The through-line is Quarkus's defining choice for gRPC: generate the stub at build time from the shared .proto files, wire it into CDI as an injectable bean, and let Mutiny's reactive types carry backpressure and cancellation for free. I'm Robert Sedor. By the end you'll have seen the generated service interface, well-known-type usage, all four RPC shapes, deadline propagation across a real downstream hop, the rich error model, interceptors, FieldMask projection, the buf breaking-change gate, three concurrency models on one method, a server-owned async operation, demand-driven streaming at scale, performance tuning knobs, mTLS, JWT authorization, OpenTelemetry tracing, the load-balancing failure mode on a real cluster and its fixes, JSON/HTTP transcoding through Envoy, @QuarkusTest, a deadline-exceeded repro, and the Final Project that ties every one of those together in one process.</a:t>
+              <a:t>Welcome to the Quarkus implementation deck. This is deck two of three in the API Patterns &amp; Practices: gRPC series. The concepts deck established the patterns and the reasoning, stack-agnostic; this deck shows how each of those patterns is actually built in Quarkus — the quarkus-grpc extension, generated Mutiny stubs, Uni for unary calls and Multi for every streaming shape — against the same shared Protobuf contract and the same shipping and cargo domain. Everything you'll see is real code pulled from the site's runnable examples under examples star slash quarkus. The through-line is Quarkus's defining choice for gRPC: generate the stub at build time from the shared .proto files, wire it into CDI as an injectable bean, and let Mutiny's reactive types carry backpressure and cancellation without extra code. I'm Robert Sedor. By the end you'll have seen the generated service interface, well-known-type usage, all four RPC shapes, deadline propagation across a real downstream hop, the rich error model, interceptors, FieldMask projection, the buf breaking-change gate, three concurrency models on one method, a server-owned async operation, demand-driven streaming at scale, performance tuning knobs, mTLS, JWT authorization, OpenTelemetry tracing, the load-balancing failure mode on a real cluster and its fixes, JSON/HTTP transcoding through Envoy, @QuarkusTest, a deadline-exceeded repro, and the Final Project that ties every one of those together in one process.</a:t>
             </a:r>
             <a:endParaRPr lang="en-US" dirty="0"/>
           </a:p>
@@ -655,7 +655,7 @@
           <a:p>
             <a:r>
               <a:rPr lang="en-US" dirty="0"/>
-              <a:t>Two decisions in this one class carry the whole well-known-types lesson. First, toTimestamp converts a java.time.Instant into com.google.protobuf.Timestamp by hand — seconds and nanos — because that conversion is exactly what the well-known type is: a message with two int64/int32 fields and a documented JSON mapping, RFC 3339 on the wire, nothing more exotic. Second, Money.amount is a string, '4200.00', not a double — the same decimal-as-string convention this book's contract uses everywhere money appears, because a binary float cannot represent currency amounts exactly and every language's JSON number type has different precision guarantees. The instants here are fixed on purpose, not Instant.now(), so this chapter's verify.sh can assert an exact RFC 3339 string in the response and so the Python stack's identical RouteBuilder equivalent produces byte-identical output for the same request — one contract, two independent implementations, proven identical by the test, not just by inspection.</a:t>
+              <a:t>Two decisions in this one class carry the whole well-known-types lesson. First, toTimestamp converts a java.time.Instant into com.google.protobuf.Timestamp by hand — seconds and nanos — because that conversion is exactly what the well-known type is: a message with two int64/int32 fields and a documented JSON mapping, RFC 3339 on the wire, nothing more exotic. Second, Money.amount is a string, '4200.00', not a double — the same decimal-as-string convention this book's contract uses everywhere money appears, because a binary float cannot represent currency amounts exactly and every language's JSON number type has different precision guarantees. The instants here are fixed, not Instant.now(), so this chapter's verify.sh can assert an exact RFC 3339 string in the response and so the Python stack's identical RouteBuilder equivalent produces byte-identical output for the same request — one contract, two independent implementations, proven identical by the test, not just by inspection.</a:t>
             </a:r>
             <a:endParaRPr lang="en-US" dirty="0"/>
           </a:p>
@@ -1095,7 +1095,7 @@
           <a:p>
             <a:r>
               <a:rPr lang="en-US" dirty="0"/>
-              <a:t>Two different Mutiny operators for two genuinely different shapes, and the contrast is the lesson. reportPositions is client-streaming — one response for the whole call — so request.collect().asList() is exactly right: it subscribes to the inbound Multi, buffers every ReportPositionsRequest until the client half-closes its side (no more coming), and completes the returned Uni with the full list at that point, exactly the 'count what arrived, ack once' shape the proto describes. sync is bidirectional — a response per request, interleaved — so request.onItem().transform(...) is the correct operator instead: it's a 1:1 mapping that preserves arrival order and emits each SyncResponse the moment its SyncRequest arrives, without waiting for the stream to finish. A response can go out before the next request arrives; nothing is buffered. Getting these backwards — folding a bidi stream, or mapping a client-streaming one — is a common mistake this pairing makes obvious once you see them side by side.</a:t>
+              <a:t>Two different Mutiny operators for two different shapes, and the contrast is the lesson. reportPositions is client-streaming — one response for the whole call — so request.collect().asList() is exactly right: it subscribes to the inbound Multi, buffers every ReportPositionsRequest until the client half-closes its side (no more coming), and completes the returned Uni with the full list at that point, exactly the 'count what arrived, ack once' shape the proto describes. sync is bidirectional — a response per request, interleaved — so request.onItem().transform(...) is the correct operator instead: it's a 1:1 mapping that preserves arrival order and emits each SyncResponse the moment its SyncRequest arrives, without waiting for the stream to finish. A response can go out before the next request arrives; nothing is buffered. Getting these backwards — folding a bidi stream, or mapping a client-streaming one — is a common mistake this pairing makes obvious once you see them side by side.</a:t>
             </a:r>
             <a:endParaRPr lang="en-US" dirty="0"/>
           </a:p>
@@ -1271,7 +1271,7 @@
           <a:p>
             <a:r>
               <a:rPr lang="en-US" dirty="0"/>
-              <a:t>This figure is the whole point of the next code slide: a deadline that arrives on an inbound call's grpc-timeout metadata is attached to grpc-java's Context before the handler method ever runs, and the correct way to propagate it downstream is to read what's left of that same budget, not to apply a fresh, fixed deadline to the next hop. A fixed per-client deadline configured in application.properties would ignore how much time the caller actually has left; reading Context.current().getDeadline() at each hop keeps the whole call chain honest about one shared clock.</a:t>
+              <a:t>This figure is the whole point of the next code slide: a deadline that arrives on an inbound call's grpc-timeout metadata is attached to grpc-java's Context before the handler method ever runs, and the correct way to propagate it downstream is to read what's left of that same budget, not to apply a fresh, fixed deadline to the next hop. A fixed per-client deadline configured in application.properties would ignore how much time the caller actually has left; reading Context.current().getDeadline() at each hop keeps the whole call chain on one shared clock.</a:t>
             </a:r>
             <a:endParaRPr lang="en-US" dirty="0"/>
           </a:p>
@@ -1887,7 +1887,7 @@
           <a:p>
             <a:r>
               <a:rPr lang="en-US" dirty="0"/>
-              <a:t>The key design decision FieldMask forces is what an absent mask means. This chapter's convention — and most real APIs' — is that zero paths means the caller wants everything, which is the only reading that keeps ListRoutes backward compatible with a client built before the field existed. The next slide shows how that projection is actually built: not a string-matching trick, but a genuinely empty Route.Builder with only the named paths merged in, so anything not named is absent from the wire, not merely zeroed, because proto3 omits unset or default fields by construction.</a:t>
+              <a:t>The key design decision FieldMask forces is what an absent mask means. This chapter's convention — and most real APIs' — is that zero paths means the caller wants everything, which is the only reading that keeps ListRoutes backward compatible with a client built before the field existed. The next slide shows how that projection is actually built: not a string-matching trick, but a fresh, empty Route.Builder with only the named paths merged in, so anything not named is absent from the wire, not merely zeroed, because proto3 omits unset or default fields by construction.</a:t>
             </a:r>
             <a:endParaRPr lang="en-US" dirty="0"/>
           </a:p>
@@ -1975,7 +1975,7 @@
           <a:p>
             <a:r>
               <a:rPr lang="en-US" dirty="0"/>
-              <a:t>FieldMaskUtil comes from protobuf-java's util library, the same jar that ships FieldMask itself — nothing bespoke. applyFieldMask returns the route unchanged when the mask is empty, satisfying the 'unset means everything' convention from the previous slide. When the mask IS populated, FieldMaskUtil.isValid checks every named path against Route's own descriptor and rejects anything Route doesn't actually have — a typo'd path fails loudly as INVALID_ARGUMENT rather than being silently dropped. FieldMaskUtil.normalize sorts and de-duplicates the paths, and FieldMaskUtil.merge does the actual projection: it builds into a genuinely empty Route.Builder, so any field not named in the mask stays at its protobuf zero value and is therefore omitted from the wire entirely — proto3's own encoding rule, not something this code has to implement by hand. Pagination alongside it is equally plain: page_size is clamped between a default and a maximum, and page_token is just the next array offset in this demo, opaque to the client but not cryptographically anything.</a:t>
+              <a:t>FieldMaskUtil comes from protobuf-java's util library, the same jar that ships FieldMask itself — nothing bespoke. applyFieldMask returns the route unchanged when the mask is empty, satisfying the 'unset means everything' convention from the previous slide. When the mask IS populated, FieldMaskUtil.isValid checks every named path against Route's own descriptor and rejects anything Route doesn't actually have — a typo'd path fails loudly as INVALID_ARGUMENT rather than being silently dropped. FieldMaskUtil.normalize sorts and de-duplicates the paths, and FieldMaskUtil.merge does the actual projection: it builds into a fresh, empty Route.Builder, so any field not named in the mask stays at its protobuf zero value and is therefore omitted from the wire entirely — proto3's own encoding rule, not something this code has to implement by hand. Pagination alongside it is equally plain: page_size is clamped between a default and a maximum, and page_token is just the next array offset in this demo, opaque to the client but not cryptographically anything.</a:t>
             </a:r>
             <a:endParaRPr lang="en-US" dirty="0"/>
           </a:p>
@@ -2239,7 +2239,7 @@
           <a:p>
             <a:r>
               <a:rPr lang="en-US" dirty="0"/>
-              <a:t>This figure lays out the three threading models this chapter's one method switches between. The correct default for any method doing blocking I/O — a JDBC call, a blocking file read, the simulated ~400ms lookup this chapter uses — is @Blocking, which dispatches the invocation onto Quarkus's default Vert.x worker pool before a single line of the method body runs; eight concurrent calls in that mode use eight of the worker pool's threads (default size 20) and genuinely overlap. The event loop is the opposite case: a small, fixed pool (2x the host's CPU count by default) meant for non-blocking work only — running blocking I/O directly on it is the literal 'thread starvation' failure mode this chapter names. Virtual threads are a third, illustrative model: a fresh platform-independent thread per call, reproducing by hand what @RunOnVirtualThread does automatically when it's the sole execution-model annotation on a method.</a:t>
+              <a:t>This figure lays out the three threading models this chapter's one method switches between. The correct default for any method doing blocking I/O — a JDBC call, a blocking file read, the simulated ~400ms lookup this chapter uses — is @Blocking, which dispatches the invocation onto Quarkus's default Vert.x worker pool before a single line of the method body runs; eight concurrent calls in that mode use eight of the worker pool's threads (default size 20) and overlap in time. The event loop is the opposite case: a small, fixed pool (2x the host's CPU count by default) meant for non-blocking work only — running blocking I/O directly on it is the literal 'thread starvation' failure mode this chapter names. Virtual threads are a third, illustrative model: a fresh platform-independent thread per call, reproducing by hand what @RunOnVirtualThread does automatically when it's the sole execution-model annotation on a method.</a:t>
             </a:r>
             <a:endParaRPr lang="en-US" dirty="0"/>
           </a:p>
@@ -2327,7 +2327,7 @@
           <a:p>
             <a:r>
               <a:rPr lang="en-US" dirty="0"/>
-              <a:t>This is the contrast the previous figure sets up, made concrete: the same eight concurrent FindOptimalRoute calls either overlap — the correct @Blocking and virtual-thread paths — or queue behind each other on a single pinned event-loop context, which is exactly what the 'starving' mode on the next slide reproduces on purpose, serialized onto one shared Vert.x context so the timing is reproducible at any core count rather than depending on how many event loops the host happens to run. The visible cost is latency: eight overlapping ~400ms calls finish in roughly 400ms total; eight serialized ones take roughly 8 times that, and — critically — so does every OTHER request sharing that same event loop, because a starved event loop doesn't just slow down the calls deliberately routed onto it, it stalls everything else scheduled there too.</a:t>
+              <a:t>This is the contrast the previous figure sets up, made concrete: the same eight concurrent FindOptimalRoute calls either overlap — the correct @Blocking and virtual-thread paths — or queue behind each other on a single pinned event-loop context, which is exactly what the 'starving' mode on the next slide reproduces, serialized onto one shared Vert.x context so the timing is reproducible at any core count rather than depending on how many event loops the host happens to run. The visible cost is latency: eight overlapping ~400ms calls finish in roughly 400ms total; eight serialized ones take roughly 8 times that, and — critically — so does every other request sharing that same event loop, because a starved event loop doesn't just slow down the calls routed onto it, it stalls everything else scheduled there too.</a:t>
             </a:r>
             <a:endParaRPr lang="en-US" dirty="0"/>
           </a:p>
@@ -2415,7 +2415,7 @@
           <a:p>
             <a:r>
               <a:rPr lang="en-US" dirty="0"/>
-              <a:t>@Blocking on the method itself is what makes the default branch correct without any extra code in the body: quarkus-grpc has already dispatched this invocation onto the Vert.x worker pool before the switch statement runs, so Uni.createFrom().item(work) in the default case runs the lookup right where it's called, no further hop needed. The 'starving' mode exists purely to demonstrate the failure this annotation prevents: Context.runOnContext schedules the identical blocking lookup onto one fixed, shared event-loop context — deliberately the SAME context across every starving call, rather than each call's own current context, which is what makes the serialization reproducible regardless of how many CPU cores the host has. The virtual-thread path, not shown in full here, calls Thread.ofVirtual().start(...) directly, reproducing by hand what the real @RunOnVirtualThread annotation does automatically when it's a method's only execution-model annotation — this demo can't just add that annotation to a second method, because one shared method needs to switch models at request time based on a demo-only mode flag.</a:t>
+              <a:t>@Blocking on the method itself is what makes the default branch correct without any extra code in the body: quarkus-grpc has already dispatched this invocation onto the Vert.x worker pool before the switch statement runs, so Uni.createFrom().item(work) in the default case runs the lookup right where it's called, no further hop needed. The 'starving' mode exists purely to demonstrate the failure this annotation prevents: Context.runOnContext schedules the identical blocking lookup onto one fixed, shared event-loop context — the same context across every starving call, rather than each call's own current context, which is what makes the serialization reproducible regardless of how many CPU cores the host has. The virtual-thread path, not shown in full here, calls Thread.ofVirtual().start(...) directly, reproducing by hand what the real @RunOnVirtualThread annotation does automatically when it's a method's only execution-model annotation — this demo can't just add that annotation to a second method, because one shared method needs to switch models at request time based on a demo-only mode flag.</a:t>
             </a:r>
             <a:endParaRPr lang="en-US" dirty="0"/>
           </a:p>
@@ -2679,7 +2679,7 @@
           <a:p>
             <a:r>
               <a:rPr lang="en-US" dirty="0"/>
-              <a:t>This is deliberately a SEPARATE @GrpcService bean from RoutingServiceImpl, not three more methods bolted onto RoutingService — because quarkus-grpc generates a fully abstract interface per service, and adding RPCs to RoutingService would be source-breaking for every existing implementation of it, even though buf breaking would never flag a new RPC as wire-incompatible. Putting the three Operation RPCs on their own OperationsService instead is the shape AIP-151 and google.longrunning.Operations both prescribe. The two beans share one @ApplicationScoped OperationRegistry, so a RecomputeRoutes call on RoutingServiceImpl and a GetOperation or WatchOperation call here read and write the exact same OperationState record — CDI injection, not a database, is what ties them together in this single-process example.</a:t>
+              <a:t>This is a separate @GrpcService bean from RoutingServiceImpl, not three more methods bolted onto RoutingService — because quarkus-grpc generates a fully abstract interface per service, and adding RPCs to RoutingService would be source-breaking for every existing implementation of it, even though buf breaking would never flag a new RPC as wire-incompatible. Putting the three Operation RPCs on their own OperationsService instead is the shape AIP-151 and google.longrunning.Operations both prescribe. The two beans share one @ApplicationScoped OperationRegistry, so a RecomputeRoutes call on RoutingServiceImpl and a GetOperation or WatchOperation call here read and write the exact same OperationState record — CDI injection, not a database, is what ties them together in this single-process example.</a:t>
             </a:r>
             <a:endParaRPr lang="en-US" dirty="0"/>
           </a:p>
@@ -2943,7 +2943,7 @@
           <a:p>
             <a:r>
               <a:rPr lang="en-US" dirty="0"/>
-              <a:t>The earlier server-streaming anchor built its whole four-event list before the Multi even existed — fine for four fixed events, the wrong default for a feed that's actually long-lived. This chapter's WatchShipment fixes that: production is gated on demand, checked both immediately (the generated gRPC bridge's subscriber already calls Subscription.request during onSubscribe, so demand often exists from the first instant) and again on every later onRequest callback, which fires when the stream becomes ready to write more. A slow consumer that stops requesting — a cancelled call, a stream not ready to write — simply never gets another event scheduled; nothing queues up server-side waiting to be dropped. The contrast case, a booking id of bkg_eager, deliberately pre-builds and timestamps every event before the Multi exists, visibly the wrong shape once you compare the two side by side.</a:t>
+              <a:t>The earlier server-streaming anchor built its whole four-event list before the Multi even existed — fine for four fixed events, the wrong default for a feed that's actually long-lived. This chapter's WatchShipment fixes that: production is gated on demand, checked both immediately (the generated gRPC bridge's subscriber already calls Subscription.request during onSubscribe, so demand often exists from the first instant) and again on every later onRequest callback, which fires when the stream becomes ready to write more. A slow consumer that stops requesting — a cancelled call, a stream not ready to write — simply never gets another event scheduled; nothing queues up server-side waiting to be dropped. The contrast case, a booking id of bkg_eager, pre-builds and timestamps every event before the Multi exists, visibly the wrong shape once you compare the two side by side.</a:t>
             </a:r>
             <a:endParaRPr lang="en-US" dirty="0"/>
           </a:p>
@@ -3119,7 +3119,7 @@
           <a:p>
             <a:r>
               <a:rPr lang="en-US" dirty="0"/>
-              <a:t>Three independent levers, each configured, not coded. Raising the inbound message-size cap matters because quarkus-grpc's default is 4MB with the separate-server topology every chapter in this book uses — fine for GetQuote's few dozen bytes, not enough for a large incoming request or a big ListRoutes page. Keepalive timing is about surviving a silent intermediary: a load balancer or NAT device can drop an idle HTTP/2 connection out from under a long-lived channel if nothing pings it periodically. Compression is the one with a genuine tradeoff rather than a free win: gzip is a clear improvement for ListRoutes' padded, repetitive payload, and close to a wash — all CPU cost, no size benefit — for GetQuote's tiny response, which is exactly why the next slide's config applies it server-wide only because THIS example's dominant payload justifies it, not as a universal default.</a:t>
+              <a:t>Three independent levers, each configured, not coded. Raising the inbound message-size cap matters because quarkus-grpc's default is 4MB with the separate-server topology every chapter in this book uses — fine for GetQuote's few dozen bytes, not enough for a large incoming request or a big ListRoutes page. Keepalive timing is about surviving a silent intermediary: a load balancer or NAT device can drop an idle HTTP/2 connection out from under a long-lived channel if nothing pings it periodically. Compression is the one with a real tradeoff rather than an unconditional win: gzip is a clear improvement for ListRoutes' padded, repetitive payload, and close to a wash — all CPU cost, no size benefit — for GetQuote's tiny response, which is exactly why the next slide's config applies it server-wide only because THIS example's dominant payload justifies it, not as a universal default.</a:t>
             </a:r>
             <a:endParaRPr lang="en-US" dirty="0"/>
           </a:p>
@@ -3207,7 +3207,7 @@
           <a:p>
             <a:r>
               <a:rPr lang="en-US" dirty="0"/>
-              <a:t>Every one of these three knobs lives under quarkus.grpc.server because this example, like every other chapter in the book, leaves quarkus.grpc.server.use-separate-server at its default of true, which puts grpc-java's own Netty server — not the Vert.x HTTP server — in front of the gRPC service; that's also why the keepalive properties are nested one level deeper, under the Netty-specific config block, rather than the Vert.x TLS registry a unified-server setup would use. The keepalive values here — 5 seconds — are deliberately short for this example so a verify.sh script can exercise a real idle gap without a slow test; a production value is typically tens of seconds to a few minutes. None of these three settings required a single line of Java to change — they're exactly the kind of tuning that should live in configuration, reviewable and environment-specific, rather than hardcoded into a servicer.</a:t>
+              <a:t>Every one of these three knobs lives under quarkus.grpc.server because this example, like every other chapter in the book, leaves quarkus.grpc.server.use-separate-server at its default of true, which puts grpc-java's own Netty server — not the Vert.x HTTP server — in front of the gRPC service; that's also why the keepalive properties are nested one level deeper, under the Netty-specific config block, rather than the Vert.x TLS registry a unified-server setup would use. The keepalive values here — 5 seconds — are short for this example so a verify.sh script can exercise an idle gap without a slow test; a production value is typically tens of seconds to a few minutes. None of these three settings required a single line of Java to change — they're exactly the kind of tuning that should live in configuration, reviewable and environment-specific, rather than hardcoded into a servicer.</a:t>
             </a:r>
             <a:endParaRPr lang="en-US" dirty="0"/>
           </a:p>
@@ -3647,7 +3647,7 @@
           <a:p>
             <a:r>
               <a:rPr lang="en-US" dirty="0"/>
-              <a:t>Authentication and authorization are two separable questions, and this chapter's interceptor answers both, in order, before the handler runs. First: is this token genuinely signed by a key this server trusts, and has it not expired — a question JwtVerifier answers with dependency-light HMAC verification, no OIDC client or JWKS fetch needed because this chapter's token uses one fixed, baked-in HS256 secret with no identity provider in the loop. Second, only once that's settled: does the token's scope claim contain whatever scope this specific method requires — a question this deck's AuthzInterceptor answers with a small static map. Both failures close the call before RoutingServiceImpl.getQuote or listRoutes ever executes; the method itself never has to know authorization exists.</a:t>
+              <a:t>Authentication and authorization are two separable questions, and this chapter's interceptor answers both, in order, before the handler runs. First: is this token signed by a key this server trusts, and has it not expired — a question JwtVerifier answers with dependency-light HMAC verification, no OIDC client or JWKS fetch needed because this chapter's token uses one fixed, baked-in HS256 secret with no identity provider in the loop. Second, only once that's settled: does the token's scope claim contain whatever scope this specific method requires — a question this deck's AuthzInterceptor answers with a small static map. Both failures close the call before RoutingServiceImpl.getQuote or listRoutes ever executes; the method itself never has to know authorization exists.</a:t>
             </a:r>
             <a:endParaRPr lang="en-US" dirty="0"/>
           </a:p>
@@ -3735,7 +3735,7 @@
           <a:p>
             <a:r>
               <a:rPr lang="en-US" dirty="0"/>
-              <a:t>METHOD_SCOPES is the whole per-method authorization policy, expressed as one map keyed on MethodDescriptor.getFullMethodName()'s 'pkg.Service/Method' format — a method with no entry is treated as 'authenticated only.' ListRoutes is gated on routes:admin, a scope the demo tokens never carry, so calling it gets PERMISSION_DENIED before RoutingServiceImpl.listRoutes ever runs — that method would also answer UNIMPLEMENTED if it were ever reached, but that's a separate, later fact about this example's scope, not the authorization decision made here. jwtVerifier.verify does the heavy lifting the appendix shows in full: split the token into three dot-separated segments, recompute an HMAC-SHA256 over the first two with the JDK's own javax.crypto.Mac, and compare using MessageDigest.isEqual — a constant-time comparison deliberately chosen over a short-circuiting one, because a signature check that returns early on the first mismatched byte leaks how many leading bytes were correct through timing, the textbook side channel for MAC verification. Server reflection is exempted from all of this, exactly as Chapter 12's interceptor exempted it, so grpcurl can still list and describe the service with no token.</a:t>
+              <a:t>METHOD_SCOPES is the whole per-method authorization policy, expressed as one map keyed on MethodDescriptor.getFullMethodName()'s 'pkg.Service/Method' format — a method with no entry is treated as 'authenticated only.' ListRoutes is gated on routes:admin, a scope the demo tokens never carry, so calling it gets PERMISSION_DENIED before RoutingServiceImpl.listRoutes ever runs — that method would also answer UNIMPLEMENTED if it were ever reached, but that's a separate, later fact about this example's scope, not the authorization decision made here. jwtVerifier.verify does the heavy lifting the appendix shows in full: split the token into three dot-separated segments, recompute an HMAC-SHA256 over the first two with the JDK's own javax.crypto.Mac, and compare using MessageDigest.isEqual — a constant-time comparison chosen over a short-circuiting one, because a signature check that returns early on the first mismatched byte leaks how many leading bytes were correct through timing, the textbook side channel for MAC verification. Server reflection is exempted from all of this, exactly as Chapter 12's interceptor exempted it, so grpcurl can still list and describe the service with no token.</a:t>
             </a:r>
             <a:endParaRPr lang="en-US" dirty="0"/>
           </a:p>
@@ -4967,7 +4967,7 @@
           <a:p>
             <a:r>
               <a:rPr lang="en-US" dirty="0"/>
-              <a:t>QUOTE_DELAY_MS stands in for a slow downstream dependency without actually adding one — the deadlines chapter earlier in this deck wired a real downstream hop for the same lesson; this chapter only needs a deadline to have something to race against, so an artificial, configurable delay is simpler. A client deadline set shorter than quoteDelayMs cannot be met and reproduces DEADLINE_EXCEEDED reliably, on demand, against the exact same request and server that succeeds fine with a longer deadline — the kind of reliable repro that's hard to get from a genuinely flaky downstream dependency. onItem().delayIt().by(...) is the detail worth noticing: it schedules the delayed emission on Mutiny's default worker pool, not a blocking Thread.sleep, so this one slow call doesn't tie up the event loop thread and stall every other request the server is handling concurrently. The UNIMPLEMENTED repro this chapter also teaches deliberately calls FindOptimalRoute, which is why that method — and three others — are left exactly as declared in the proto and never given a real implementation in this chapter's example.</a:t>
+              <a:t>QUOTE_DELAY_MS stands in for a slow downstream dependency without actually adding one — the deadlines chapter earlier in this deck wired a real downstream hop for the same lesson; this chapter only needs a deadline to have something to race against, so an artificial, configurable delay is simpler. A client deadline set shorter than quoteDelayMs cannot be met and reproduces DEADLINE_EXCEEDED reliably, on demand, against the exact same request and server that succeeds fine with a longer deadline — the kind of reliable repro that's hard to get from a flaky downstream dependency. onItem().delayIt().by(...) is the detail to note: it schedules the delayed emission on Mutiny's default worker pool, not a blocking Thread.sleep, so this one slow call doesn't tie up the event loop thread and stall every other request the server is handling concurrently. The UNIMPLEMENTED repro this chapter also teaches calls FindOptimalRoute, which is why that method — and three others — are left exactly as declared in the proto and never given a real implementation in this chapter's example.</a:t>
             </a:r>
             <a:endParaRPr lang="en-US" dirty="0"/>
           </a:p>
@@ -5143,7 +5143,7 @@
           <a:p>
             <a:r>
               <a:rPr lang="en-US" dirty="0"/>
-              <a:t>This is the composition point for the entire deck: BookingResource's REST front door calls into RoutingServiceImpl over a loopback gRPC hop, which calls QuoteServiceImpl over a second loopback hop, and TrackingServiceImpl and the built-in grpc.health.v1.Health service share the same one mTLS-required, JWT-gated port. Every pattern shown earlier in this deck is present here at once: the mTLS configuration from the security section, the AuthzInterceptor's scope checks, OTel's trace propagation across every hop, and the generated Mutiny stubs from the very first section. Zero contract change — every RPC implemented here was already declared in the shared .proto; this is simply the first place several of them, the streaming and bidirectional ones especially, run for real instead of answering UNIMPLEMENTED.</a:t>
+              <a:t>This is the composition point for the entire deck: BookingResource's REST front door calls into RoutingServiceImpl over a loopback gRPC hop, which calls QuoteServiceImpl over a second loopback hop, and TrackingServiceImpl and the built-in grpc.health.v1.Health service share the same one mTLS-required, JWT-gated port. Every pattern shown earlier in this deck is present here at once: the mTLS configuration from the security section, the AuthzInterceptor's scope checks, OTel's trace propagation across every hop, and the generated Mutiny stubs from the very first section. Zero contract change — every RPC implemented here was already declared in the shared .proto; this is simply the first place several of them, the streaming and bidirectional ones especially, run instead of answering UNIMPLEMENTED.</a:t>
             </a:r>
             <a:endParaRPr lang="en-US" dirty="0"/>
           </a:p>
@@ -5935,7 +5935,7 @@
           <a:p>
             <a:r>
               <a:rPr lang="en-US" dirty="0"/>
-              <a:t>This is the real negotiation policy behind NegotiateRoute, the bidirectional-streaming RPC that stayed UNIMPLEMENTED through every earlier chapter and only gets a real body in the Final Project. The policy itself is intentionally simple and, more importantly, deterministic: a proposal priced at or under $5000.00 is accepted as-is, and anything over it is countered at exactly 90% of the proposed price, computed with BigDecimal and HALF_UP rounding to two decimal places — never a double, for the same decimal-precision reason Money.amount is a string everywhere else in this contract. No randomness and no clock dependence means verify.sh can assert an exact counter amount for a fixed input and get the identical answer from both the Quarkus and the Python implementation of this same policy — the same discipline every other anchor's formula in this book follows, extended to the one RPC shape, bidirectional streaming, that none of the single-request anchors could exercise.</a:t>
+              <a:t>This is the real negotiation policy behind NegotiateRoute, the bidirectional-streaming RPC that stayed UNIMPLEMENTED through every earlier chapter and only gets a real body in the Final Project. The policy itself is simple and, more importantly, deterministic: a proposal priced at or under $5000.00 is accepted as-is, and anything over it is countered at exactly 90% of the proposed price, computed with BigDecimal and HALF_UP rounding to two decimal places — never a double, for the same decimal-precision reason Money.amount is a string everywhere else in this contract. No randomness and no clock dependence means verify.sh can assert an exact counter amount for a fixed input and get the identical answer from both the Quarkus and the Python implementation of this same policy — the same discipline every other anchor's formula in this book follows, extended to the one RPC shape, bidirectional streaming, that none of the single-request anchors could exercise.</a:t>
             </a:r>
             <a:endParaRPr lang="en-US" dirty="0"/>
           </a:p>
@@ -6287,7 +6287,7 @@
           <a:p>
             <a:r>
               <a:rPr lang="en-US" dirty="0"/>
-              <a:t>This figure is the catalog the rest of the deck draws from: Timestamp and Duration for points and spans of time, FieldMask for partial reads and writes (the ListRoutes anchor later in this deck), and the wrapper types for a scalar that needs to distinguish zero from unset. None of these are invented by this book's contract — they're part of the Protobuf standard library, shipped in every language's generated-code runtime, including protobuf-java. The next slide shows the Java side of the first two: a Route whose Leg carries real departs_at and arrives_at Timestamps, and a Money whose amount is a decimal string, never a binary float — the same convention the sibling REST site's JSON Schema enforces for the identical shape.</a:t>
+              <a:t>This figure is the catalog later slides draw from: Timestamp and Duration for points and spans of time, FieldMask for partial reads and writes (the ListRoutes anchor later in this deck), and the wrapper types for a scalar that needs to distinguish zero from unset. None of these are invented by this book's contract — they're part of the Protobuf standard library, shipped in every language's generated-code runtime, including protobuf-java. The next slide shows the Java side of the first two: a Route whose Leg carries real departs_at and arrives_at Timestamps, and a Money whose amount is a decimal string, never a binary float — the same convention the sibling REST site's JSON Schema enforces for the identical shape.</a:t>
             </a:r>
             <a:endParaRPr lang="en-US" dirty="0"/>
           </a:p>
@@ -15022,7 +15022,7 @@
                 <a:ea typeface="Red Hat Mono" pitchFamily="34" charset="-122"/>
                 <a:cs typeface="Red Hat Mono" pitchFamily="34" charset="-120"/>
               </a:rPr>
-              <a:t>        case MODE_STARVING -&gt; onEventLoop(work);     // deliberately WRONG: blocks the loop
+              <a:t>        case MODE_STARVING -&gt; onEventLoop(work);     // WRONG: blocks the loop
 </a:t>
             </a:r>
             <a:pPr algn="l" indent="0" marL="0">
@@ -15260,7 +15260,7 @@
                 <a:ea typeface="Red Hat Text" pitchFamily="34" charset="-122"/>
                 <a:cs typeface="Red Hat Text" pitchFamily="34" charset="-120"/>
               </a:rPr>
-              <a:t>@Blocking is the correct default; onEventLoop reproduces the starvation bug on purpose, for contrast.</a:t>
+              <a:t>@Blocking is the correct default; onEventLoop reproduces the starvation bug for contrast.</a:t>
             </a:r>
             <a:endParaRPr lang="en-US" sz="1300" dirty="0"/>
           </a:p>
@@ -25315,7 +25315,7 @@
                 <a:ea typeface="Red Hat Mono" pitchFamily="34" charset="-122"/>
                 <a:cs typeface="Red Hat Mono" pitchFamily="34" charset="-120"/>
               </a:rPr>
-              <a:t>// UNIMPLEMENTED here on purpose — this chapter's UNIMPLEMENTED repro
+              <a:t>// UNIMPLEMENTED here — this chapter's UNIMPLEMENTED repro
 </a:t>
             </a:r>
             <a:pPr algn="l" indent="0" marL="0">
@@ -26782,7 +26782,7 @@
                 <a:ea typeface="Red Hat Text" pitchFamily="34" charset="-122"/>
                 <a:cs typeface="Red Hat Text" pitchFamily="34" charset="-120"/>
               </a:rPr>
-              <a:t>OTel trace propagation and the built-in health service, for free.</a:t>
+              <a:t>OTel trace propagation and the built-in health service, with no extra code.</a:t>
             </a:r>
             <a:endParaRPr lang="en-US" sz="1500" dirty="0"/>
           </a:p>
@@ -31521,7 +31521,7 @@
                 <a:ea typeface="Red Hat Text" pitchFamily="34" charset="-122"/>
                 <a:cs typeface="Red Hat Text" pitchFamily="34" charset="-120"/>
               </a:rPr>
-              <a:t>Deliberately NO quarkus.grpc.server.ssl.* here — on CRC, OpenShift Service Mesh's STRICT PeerAuthentication terminates mTLS in the sidecar instead.</a:t>
+              <a:t>No quarkus.grpc.server.ssl.* here — on CRC, OpenShift Service Mesh's STRICT PeerAuthentication terminates mTLS in the sidecar instead.</a:t>
             </a:r>
             <a:endParaRPr lang="en-US" sz="1300" dirty="0"/>
           </a:p>
